--- a/Documentation/Slides/Week_17.pptx
+++ b/Documentation/Slides/Week_17.pptx
@@ -5,48 +5,50 @@
     <p:sldMasterId id="2147483648" r:id="rId4"/>
   </p:sldMasterIdLst>
   <p:notesMasterIdLst>
-    <p:notesMasterId r:id="rId15"/>
+    <p:notesMasterId r:id="rId17"/>
   </p:notesMasterIdLst>
   <p:sldIdLst>
     <p:sldId id="267" r:id="rId5"/>
     <p:sldId id="279" r:id="rId6"/>
     <p:sldId id="280" r:id="rId7"/>
-    <p:sldId id="282" r:id="rId8"/>
-    <p:sldId id="283" r:id="rId9"/>
-    <p:sldId id="284" r:id="rId10"/>
-    <p:sldId id="285" r:id="rId11"/>
-    <p:sldId id="286" r:id="rId12"/>
-    <p:sldId id="278" r:id="rId13"/>
-    <p:sldId id="277" r:id="rId14"/>
+    <p:sldId id="287" r:id="rId8"/>
+    <p:sldId id="282" r:id="rId9"/>
+    <p:sldId id="283" r:id="rId10"/>
+    <p:sldId id="284" r:id="rId11"/>
+    <p:sldId id="285" r:id="rId12"/>
+    <p:sldId id="286" r:id="rId13"/>
+    <p:sldId id="278" r:id="rId14"/>
+    <p:sldId id="288" r:id="rId15"/>
+    <p:sldId id="277" r:id="rId16"/>
   </p:sldIdLst>
   <p:sldSz cx="9144000" cy="6858000" type="screen4x3"/>
   <p:notesSz cx="6858000" cy="9144000"/>
   <p:embeddedFontLst>
     <p:embeddedFont>
       <p:font typeface="Acumin Pro Condensed Semibold" panose="020B0706020202020204" pitchFamily="34" charset="77"/>
-      <p:regular r:id="rId16"/>
-      <p:bold r:id="rId17"/>
-      <p:italic r:id="rId18"/>
-      <p:boldItalic r:id="rId19"/>
+      <p:regular r:id="rId18"/>
+      <p:bold r:id="rId19"/>
+      <p:italic r:id="rId20"/>
+      <p:boldItalic r:id="rId21"/>
     </p:embeddedFont>
     <p:embeddedFont>
       <p:font typeface="Acumin Pro Medium" panose="020B0604020202020204" pitchFamily="34" charset="77"/>
-      <p:regular r:id="rId20"/>
-      <p:italic r:id="rId21"/>
-    </p:embeddedFont>
-    <p:embeddedFont>
-      <p:font typeface="Franklin Gothic Book" panose="020B0503020102020204" pitchFamily="34" charset="0"/>
       <p:regular r:id="rId22"/>
       <p:italic r:id="rId23"/>
     </p:embeddedFont>
     <p:embeddedFont>
-      <p:font typeface="Franklin Gothic Medium" panose="020B0603020102020204" pitchFamily="34" charset="0"/>
+      <p:font typeface="Franklin Gothic Book" panose="020B0503020102020204" pitchFamily="34" charset="0"/>
       <p:regular r:id="rId24"/>
       <p:italic r:id="rId25"/>
     </p:embeddedFont>
     <p:embeddedFont>
+      <p:font typeface="Franklin Gothic Medium" panose="020B0603020102020204" pitchFamily="34" charset="0"/>
+      <p:regular r:id="rId26"/>
+      <p:italic r:id="rId27"/>
+    </p:embeddedFont>
+    <p:embeddedFont>
       <p:font typeface="Franklin Gothic Medium Cond" panose="020B0606030402020204" pitchFamily="34" charset="0"/>
-      <p:regular r:id="rId26"/>
+      <p:regular r:id="rId28"/>
     </p:embeddedFont>
   </p:embeddedFontLst>
   <p:defaultTextStyle>
@@ -251,7 +253,7 @@
           <a:p>
             <a:fld id="{01926CF7-48D8-2F46-AFC8-8A5D2298DFDD}" type="datetimeFigureOut">
               <a:rPr lang="en-US" smtClean="0"/>
-              <a:t>12/22/25</a:t>
+              <a:t>1/16/26</a:t>
             </a:fld>
             <a:endParaRPr lang="en-US"/>
           </a:p>
@@ -682,6 +684,109 @@
     <p:extLst>
       <p:ext uri="{BB962C8B-B14F-4D97-AF65-F5344CB8AC3E}">
         <p14:creationId xmlns:p14="http://schemas.microsoft.com/office/powerpoint/2010/main" val="1580631068"/>
+      </p:ext>
+    </p:extLst>
+  </p:cSld>
+  <p:clrMapOvr>
+    <a:masterClrMapping/>
+  </p:clrMapOvr>
+</p:notes>
+</file>
+
+<file path=ppt/notesSlides/notesSlide3.xml><?xml version="1.0" encoding="utf-8"?>
+<p:notes xmlns:a="http://schemas.openxmlformats.org/drawingml/2006/main" xmlns:r="http://schemas.openxmlformats.org/officeDocument/2006/relationships" xmlns:p="http://schemas.openxmlformats.org/presentationml/2006/main">
+  <p:cSld>
+    <p:spTree>
+      <p:nvGrpSpPr>
+        <p:cNvPr id="1" name=""/>
+        <p:cNvGrpSpPr/>
+        <p:nvPr/>
+      </p:nvGrpSpPr>
+      <p:grpSpPr>
+        <a:xfrm>
+          <a:off x="0" y="0"/>
+          <a:ext cx="0" cy="0"/>
+          <a:chOff x="0" y="0"/>
+          <a:chExt cx="0" cy="0"/>
+        </a:xfrm>
+      </p:grpSpPr>
+      <p:sp>
+        <p:nvSpPr>
+          <p:cNvPr id="2" name="Slide Image Placeholder 1"/>
+          <p:cNvSpPr>
+            <a:spLocks noGrp="1" noRot="1" noChangeAspect="1"/>
+          </p:cNvSpPr>
+          <p:nvPr>
+            <p:ph type="sldImg"/>
+          </p:nvPr>
+        </p:nvSpPr>
+        <p:spPr/>
+      </p:sp>
+      <p:sp>
+        <p:nvSpPr>
+          <p:cNvPr id="3" name="Notes Placeholder 2"/>
+          <p:cNvSpPr>
+            <a:spLocks noGrp="1"/>
+          </p:cNvSpPr>
+          <p:nvPr>
+            <p:ph type="body" idx="1"/>
+          </p:nvPr>
+        </p:nvSpPr>
+        <p:spPr/>
+        <p:txBody>
+          <a:bodyPr/>
+          <a:lstStyle/>
+          <a:p>
+            <a:r>
+              <a:rPr lang="en-US" dirty="0" err="1"/>
+              <a:t>Sabattical</a:t>
+            </a:r>
+            <a:r>
+              <a:rPr lang="en-US" dirty="0"/>
+              <a:t>?</a:t>
+            </a:r>
+          </a:p>
+          <a:p>
+            <a:r>
+              <a:rPr lang="en-US" dirty="0"/>
+              <a:t>Leon Salas Weekly Meetings</a:t>
+            </a:r>
+          </a:p>
+          <a:p>
+            <a:r>
+              <a:rPr lang="en-US" dirty="0"/>
+              <a:t>Meeting Time</a:t>
+            </a:r>
+          </a:p>
+        </p:txBody>
+      </p:sp>
+      <p:sp>
+        <p:nvSpPr>
+          <p:cNvPr id="4" name="Slide Number Placeholder 3"/>
+          <p:cNvSpPr>
+            <a:spLocks noGrp="1"/>
+          </p:cNvSpPr>
+          <p:nvPr>
+            <p:ph type="sldNum" sz="quarter" idx="5"/>
+          </p:nvPr>
+        </p:nvSpPr>
+        <p:spPr/>
+        <p:txBody>
+          <a:bodyPr/>
+          <a:lstStyle/>
+          <a:p>
+            <a:fld id="{237BF745-0557-B241-863F-056113C7032A}" type="slidenum">
+              <a:rPr lang="en-US" smtClean="0"/>
+              <a:t>11</a:t>
+            </a:fld>
+            <a:endParaRPr lang="en-US"/>
+          </a:p>
+        </p:txBody>
+      </p:sp>
+    </p:spTree>
+    <p:extLst>
+      <p:ext uri="{BB962C8B-B14F-4D97-AF65-F5344CB8AC3E}">
+        <p14:creationId xmlns:p14="http://schemas.microsoft.com/office/powerpoint/2010/main" val="833689646"/>
       </p:ext>
     </p:extLst>
   </p:cSld>
@@ -13599,7 +13704,7 @@
             </a:r>
             <a:r>
               <a:rPr lang="en-US" dirty="0"/>
-              <a:t>17</a:t>
+              <a:t>1</a:t>
             </a:r>
             <a:endParaRPr lang="en-US" b="1" dirty="0">
               <a:latin typeface="Acumin Pro Condensed Semibold" panose="020B0506020202020204" pitchFamily="34" charset="77"/>
@@ -13662,7 +13767,7 @@
           <a:p>
             <a:r>
               <a:rPr lang="en-US" dirty="0"/>
-              <a:t>12/22/2025</a:t>
+              <a:t>01/16/2026</a:t>
             </a:r>
           </a:p>
         </p:txBody>
@@ -13699,6 +13804,349 @@
       </p:grpSpPr>
       <p:sp>
         <p:nvSpPr>
+          <p:cNvPr id="2" name="Text Placeholder 1">
+            <a:extLst>
+              <a:ext uri="{FF2B5EF4-FFF2-40B4-BE49-F238E27FC236}">
+                <a16:creationId xmlns:a16="http://schemas.microsoft.com/office/drawing/2014/main" id="{11B29CAD-3B43-3BC0-D2EC-A53874ABB884}"/>
+              </a:ext>
+            </a:extLst>
+          </p:cNvPr>
+          <p:cNvSpPr>
+            <a:spLocks noGrp="1"/>
+          </p:cNvSpPr>
+          <p:nvPr>
+            <p:ph type="body" sz="quarter" idx="11"/>
+          </p:nvPr>
+        </p:nvSpPr>
+        <p:spPr/>
+        <p:txBody>
+          <a:bodyPr/>
+          <a:lstStyle/>
+          <a:p>
+            <a:r>
+              <a:rPr lang="en-US" dirty="0"/>
+              <a:t>Blockers &amp; Next Week’s Work</a:t>
+            </a:r>
+          </a:p>
+        </p:txBody>
+      </p:sp>
+      <p:sp>
+        <p:nvSpPr>
+          <p:cNvPr id="3" name="Text Placeholder 2">
+            <a:extLst>
+              <a:ext uri="{FF2B5EF4-FFF2-40B4-BE49-F238E27FC236}">
+                <a16:creationId xmlns:a16="http://schemas.microsoft.com/office/drawing/2014/main" id="{A9F87380-04A3-DD16-EAB3-0921830BDF50}"/>
+              </a:ext>
+            </a:extLst>
+          </p:cNvPr>
+          <p:cNvSpPr>
+            <a:spLocks noGrp="1"/>
+          </p:cNvSpPr>
+          <p:nvPr>
+            <p:ph type="body" sz="quarter" idx="10"/>
+          </p:nvPr>
+        </p:nvSpPr>
+        <p:spPr/>
+        <p:txBody>
+          <a:bodyPr/>
+          <a:lstStyle/>
+          <a:p>
+            <a:pPr marL="285750" indent="-285750">
+              <a:buFont typeface="Arial" panose="020B0604020202020204" pitchFamily="34" charset="0"/>
+              <a:buChar char="•"/>
+            </a:pPr>
+            <a:r>
+              <a:rPr lang="en-US" dirty="0"/>
+              <a:t>Need to find the suitable battery replacement on the PCB</a:t>
+            </a:r>
+          </a:p>
+          <a:p>
+            <a:pPr marL="285750" indent="-285750">
+              <a:buFont typeface="Arial" panose="020B0604020202020204" pitchFamily="34" charset="0"/>
+              <a:buChar char="•"/>
+            </a:pPr>
+            <a:r>
+              <a:rPr lang="en-US" dirty="0"/>
+              <a:t>Work on Hybrid Approach for Data Collection</a:t>
+            </a:r>
+          </a:p>
+          <a:p>
+            <a:pPr marL="285750" indent="-285750">
+              <a:buFont typeface="Arial" panose="020B0604020202020204" pitchFamily="34" charset="0"/>
+              <a:buChar char="•"/>
+            </a:pPr>
+            <a:r>
+              <a:rPr lang="en-US" dirty="0"/>
+              <a:t>Fix Issue where Nicla IMU turned off unexpectedly after a prolonged time of data collection</a:t>
+            </a:r>
+          </a:p>
+          <a:p>
+            <a:pPr marL="285750" indent="-285750">
+              <a:buFont typeface="Arial" panose="020B0604020202020204" pitchFamily="34" charset="0"/>
+              <a:buChar char="•"/>
+            </a:pPr>
+            <a:r>
+              <a:rPr lang="en-US" dirty="0"/>
+              <a:t>Get Sample Data on Force Impacts (Small, Medium, Large Impacts)</a:t>
+            </a:r>
+          </a:p>
+          <a:p>
+            <a:pPr marL="285750" indent="-285750">
+              <a:buFont typeface="Arial" panose="020B0604020202020204" pitchFamily="34" charset="0"/>
+              <a:buChar char="•"/>
+            </a:pPr>
+            <a:r>
+              <a:rPr lang="en-US" dirty="0"/>
+              <a:t>Prepare the 2+ hour version of data test</a:t>
+            </a:r>
+          </a:p>
+        </p:txBody>
+      </p:sp>
+      <p:sp>
+        <p:nvSpPr>
+          <p:cNvPr id="4" name="Title 3">
+            <a:extLst>
+              <a:ext uri="{FF2B5EF4-FFF2-40B4-BE49-F238E27FC236}">
+                <a16:creationId xmlns:a16="http://schemas.microsoft.com/office/drawing/2014/main" id="{47D02411-52BC-0A6C-B958-234593BB194F}"/>
+              </a:ext>
+            </a:extLst>
+          </p:cNvPr>
+          <p:cNvSpPr>
+            <a:spLocks noGrp="1"/>
+          </p:cNvSpPr>
+          <p:nvPr>
+            <p:ph type="title"/>
+          </p:nvPr>
+        </p:nvSpPr>
+        <p:spPr/>
+        <p:txBody>
+          <a:bodyPr/>
+          <a:lstStyle/>
+          <a:p>
+            <a:r>
+              <a:rPr lang="en-US" dirty="0"/>
+              <a:t>Next Week</a:t>
+            </a:r>
+          </a:p>
+        </p:txBody>
+      </p:sp>
+      <p:sp>
+        <p:nvSpPr>
+          <p:cNvPr id="5" name="Footer Placeholder 4">
+            <a:extLst>
+              <a:ext uri="{FF2B5EF4-FFF2-40B4-BE49-F238E27FC236}">
+                <a16:creationId xmlns:a16="http://schemas.microsoft.com/office/drawing/2014/main" id="{51BAB307-58AA-C3F2-0BBB-500351B01F7A}"/>
+              </a:ext>
+            </a:extLst>
+          </p:cNvPr>
+          <p:cNvSpPr>
+            <a:spLocks noGrp="1"/>
+          </p:cNvSpPr>
+          <p:nvPr>
+            <p:ph type="ftr" sz="quarter" idx="12"/>
+          </p:nvPr>
+        </p:nvSpPr>
+        <p:spPr/>
+        <p:txBody>
+          <a:bodyPr/>
+          <a:lstStyle/>
+          <a:p>
+            <a:pPr algn="r"/>
+            <a:r>
+              <a:rPr lang="en-US" dirty="0"/>
+              <a:t>6/7</a:t>
+            </a:r>
+          </a:p>
+        </p:txBody>
+      </p:sp>
+    </p:spTree>
+    <p:extLst>
+      <p:ext uri="{BB962C8B-B14F-4D97-AF65-F5344CB8AC3E}">
+        <p14:creationId xmlns:p14="http://schemas.microsoft.com/office/powerpoint/2010/main" val="257444251"/>
+      </p:ext>
+    </p:extLst>
+  </p:cSld>
+  <p:clrMapOvr>
+    <a:masterClrMapping/>
+  </p:clrMapOvr>
+</p:sld>
+</file>
+
+<file path=ppt/slides/slide11.xml><?xml version="1.0" encoding="utf-8"?>
+<p:sld xmlns:a="http://schemas.openxmlformats.org/drawingml/2006/main" xmlns:r="http://schemas.openxmlformats.org/officeDocument/2006/relationships" xmlns:p="http://schemas.openxmlformats.org/presentationml/2006/main">
+  <p:cSld>
+    <p:spTree>
+      <p:nvGrpSpPr>
+        <p:cNvPr id="1" name="">
+          <a:extLst>
+            <a:ext uri="{FF2B5EF4-FFF2-40B4-BE49-F238E27FC236}">
+              <a16:creationId xmlns:a16="http://schemas.microsoft.com/office/drawing/2014/main" id="{505BF36D-4A0A-35E0-585D-81C728698A0C}"/>
+            </a:ext>
+          </a:extLst>
+        </p:cNvPr>
+        <p:cNvGrpSpPr/>
+        <p:nvPr/>
+      </p:nvGrpSpPr>
+      <p:grpSpPr>
+        <a:xfrm>
+          <a:off x="0" y="0"/>
+          <a:ext cx="0" cy="0"/>
+          <a:chOff x="0" y="0"/>
+          <a:chExt cx="0" cy="0"/>
+        </a:xfrm>
+      </p:grpSpPr>
+      <p:sp>
+        <p:nvSpPr>
+          <p:cNvPr id="2" name="Text Placeholder 1">
+            <a:extLst>
+              <a:ext uri="{FF2B5EF4-FFF2-40B4-BE49-F238E27FC236}">
+                <a16:creationId xmlns:a16="http://schemas.microsoft.com/office/drawing/2014/main" id="{EA89B3BC-0C54-E2F6-2DAC-AEC39FB579C4}"/>
+              </a:ext>
+            </a:extLst>
+          </p:cNvPr>
+          <p:cNvSpPr>
+            <a:spLocks noGrp="1"/>
+          </p:cNvSpPr>
+          <p:nvPr>
+            <p:ph type="body" sz="quarter" idx="11"/>
+          </p:nvPr>
+        </p:nvSpPr>
+        <p:spPr/>
+        <p:txBody>
+          <a:bodyPr/>
+          <a:lstStyle/>
+          <a:p>
+            <a:r>
+              <a:rPr lang="en-US" dirty="0"/>
+              <a:t>Outline Entire Semester Goals</a:t>
+            </a:r>
+          </a:p>
+        </p:txBody>
+      </p:sp>
+      <p:sp>
+        <p:nvSpPr>
+          <p:cNvPr id="3" name="Text Placeholder 2">
+            <a:extLst>
+              <a:ext uri="{FF2B5EF4-FFF2-40B4-BE49-F238E27FC236}">
+                <a16:creationId xmlns:a16="http://schemas.microsoft.com/office/drawing/2014/main" id="{2906847D-6C77-2972-16ED-9D5EDF24A589}"/>
+              </a:ext>
+            </a:extLst>
+          </p:cNvPr>
+          <p:cNvSpPr>
+            <a:spLocks noGrp="1"/>
+          </p:cNvSpPr>
+          <p:nvPr>
+            <p:ph type="body" sz="quarter" idx="10"/>
+          </p:nvPr>
+        </p:nvSpPr>
+        <p:spPr/>
+        <p:txBody>
+          <a:bodyPr/>
+          <a:lstStyle/>
+          <a:p>
+            <a:r>
+              <a:rPr lang="en-US"/>
+              <a:t>Questions:</a:t>
+            </a:r>
+          </a:p>
+          <a:p>
+            <a:pPr marL="285750" indent="-285750">
+              <a:buFont typeface="Arial" panose="020B0604020202020204" pitchFamily="34" charset="0"/>
+              <a:buChar char="•"/>
+            </a:pPr>
+            <a:endParaRPr lang="en-US" dirty="0"/>
+          </a:p>
+        </p:txBody>
+      </p:sp>
+      <p:sp>
+        <p:nvSpPr>
+          <p:cNvPr id="4" name="Title 3">
+            <a:extLst>
+              <a:ext uri="{FF2B5EF4-FFF2-40B4-BE49-F238E27FC236}">
+                <a16:creationId xmlns:a16="http://schemas.microsoft.com/office/drawing/2014/main" id="{8D16378A-3B82-C468-F62D-21497ABF27E4}"/>
+              </a:ext>
+            </a:extLst>
+          </p:cNvPr>
+          <p:cNvSpPr>
+            <a:spLocks noGrp="1"/>
+          </p:cNvSpPr>
+          <p:nvPr>
+            <p:ph type="title"/>
+          </p:nvPr>
+        </p:nvSpPr>
+        <p:spPr/>
+        <p:txBody>
+          <a:bodyPr/>
+          <a:lstStyle/>
+          <a:p>
+            <a:r>
+              <a:rPr lang="en-US" dirty="0"/>
+              <a:t>This Semester</a:t>
+            </a:r>
+          </a:p>
+        </p:txBody>
+      </p:sp>
+      <p:sp>
+        <p:nvSpPr>
+          <p:cNvPr id="5" name="Footer Placeholder 4">
+            <a:extLst>
+              <a:ext uri="{FF2B5EF4-FFF2-40B4-BE49-F238E27FC236}">
+                <a16:creationId xmlns:a16="http://schemas.microsoft.com/office/drawing/2014/main" id="{6DF1CFDE-90B7-B6A6-C8CB-3D4D4E5BC6D3}"/>
+              </a:ext>
+            </a:extLst>
+          </p:cNvPr>
+          <p:cNvSpPr>
+            <a:spLocks noGrp="1"/>
+          </p:cNvSpPr>
+          <p:nvPr>
+            <p:ph type="ftr" sz="quarter" idx="12"/>
+          </p:nvPr>
+        </p:nvSpPr>
+        <p:spPr/>
+        <p:txBody>
+          <a:bodyPr/>
+          <a:lstStyle/>
+          <a:p>
+            <a:pPr algn="r"/>
+            <a:r>
+              <a:rPr lang="en-US" dirty="0"/>
+              <a:t>6/7</a:t>
+            </a:r>
+          </a:p>
+        </p:txBody>
+      </p:sp>
+    </p:spTree>
+    <p:extLst>
+      <p:ext uri="{BB962C8B-B14F-4D97-AF65-F5344CB8AC3E}">
+        <p14:creationId xmlns:p14="http://schemas.microsoft.com/office/powerpoint/2010/main" val="1379009514"/>
+      </p:ext>
+    </p:extLst>
+  </p:cSld>
+  <p:clrMapOvr>
+    <a:masterClrMapping/>
+  </p:clrMapOvr>
+</p:sld>
+</file>
+
+<file path=ppt/slides/slide12.xml><?xml version="1.0" encoding="utf-8"?>
+<p:sld xmlns:a="http://schemas.openxmlformats.org/drawingml/2006/main" xmlns:r="http://schemas.openxmlformats.org/officeDocument/2006/relationships" xmlns:p="http://schemas.openxmlformats.org/presentationml/2006/main">
+  <p:cSld>
+    <p:spTree>
+      <p:nvGrpSpPr>
+        <p:cNvPr id="1" name=""/>
+        <p:cNvGrpSpPr/>
+        <p:nvPr/>
+      </p:nvGrpSpPr>
+      <p:grpSpPr>
+        <a:xfrm>
+          <a:off x="0" y="0"/>
+          <a:ext cx="0" cy="0"/>
+          <a:chOff x="0" y="0"/>
+          <a:chExt cx="0" cy="0"/>
+        </a:xfrm>
+      </p:grpSpPr>
+      <p:sp>
+        <p:nvSpPr>
           <p:cNvPr id="2" name="Title 1">
             <a:extLst>
               <a:ext uri="{FF2B5EF4-FFF2-40B4-BE49-F238E27FC236}">
@@ -13854,6 +14302,16 @@
             </a:r>
           </a:p>
           <a:p>
+            <a:pPr marL="628650" lvl="1" indent="-285750">
+              <a:buFont typeface="Arial" panose="020B0604020202020204" pitchFamily="34" charset="0"/>
+              <a:buChar char="•"/>
+            </a:pPr>
+            <a:r>
+              <a:rPr lang="en-US" dirty="0"/>
+              <a:t>Initial Purchase Failed + New Purchase</a:t>
+            </a:r>
+          </a:p>
+          <a:p>
             <a:pPr marL="285750" indent="-285750">
               <a:buFont typeface="Arial" panose="020B0604020202020204" pitchFamily="34" charset="0"/>
               <a:buChar char="•"/>
@@ -13921,6 +14379,16 @@
             <a:r>
               <a:rPr lang="en-US" dirty="0"/>
               <a:t>Need to change some firmware on the Nicla Sense</a:t>
+            </a:r>
+          </a:p>
+          <a:p>
+            <a:pPr marL="285750" indent="-285750">
+              <a:buFont typeface="Arial" panose="020B0604020202020204" pitchFamily="34" charset="0"/>
+              <a:buChar char="•"/>
+            </a:pPr>
+            <a:r>
+              <a:rPr lang="en-US" dirty="0"/>
+              <a:t>This Semester</a:t>
             </a:r>
           </a:p>
           <a:p>
@@ -14195,6 +14663,203 @@
   <p:cSld>
     <p:spTree>
       <p:nvGrpSpPr>
+        <p:cNvPr id="1" name="">
+          <a:extLst>
+            <a:ext uri="{FF2B5EF4-FFF2-40B4-BE49-F238E27FC236}">
+              <a16:creationId xmlns:a16="http://schemas.microsoft.com/office/drawing/2014/main" id="{43C85705-265A-D7DF-670C-6D4E3A0EA075}"/>
+            </a:ext>
+          </a:extLst>
+        </p:cNvPr>
+        <p:cNvGrpSpPr/>
+        <p:nvPr/>
+      </p:nvGrpSpPr>
+      <p:grpSpPr>
+        <a:xfrm>
+          <a:off x="0" y="0"/>
+          <a:ext cx="0" cy="0"/>
+          <a:chOff x="0" y="0"/>
+          <a:chExt cx="0" cy="0"/>
+        </a:xfrm>
+      </p:grpSpPr>
+      <p:sp>
+        <p:nvSpPr>
+          <p:cNvPr id="2" name="Text Placeholder 1">
+            <a:extLst>
+              <a:ext uri="{FF2B5EF4-FFF2-40B4-BE49-F238E27FC236}">
+                <a16:creationId xmlns:a16="http://schemas.microsoft.com/office/drawing/2014/main" id="{33F7AA1F-9665-E580-DAF6-32F73F4C9158}"/>
+              </a:ext>
+            </a:extLst>
+          </p:cNvPr>
+          <p:cNvSpPr>
+            <a:spLocks noGrp="1"/>
+          </p:cNvSpPr>
+          <p:nvPr>
+            <p:ph type="body" sz="quarter" idx="11"/>
+          </p:nvPr>
+        </p:nvSpPr>
+        <p:spPr/>
+        <p:txBody>
+          <a:bodyPr/>
+          <a:lstStyle/>
+          <a:p>
+            <a:r>
+              <a:rPr lang="en-US" dirty="0"/>
+              <a:t>Initial Purchase Failed + New Purchase Successful</a:t>
+            </a:r>
+          </a:p>
+        </p:txBody>
+      </p:sp>
+      <p:sp>
+        <p:nvSpPr>
+          <p:cNvPr id="3" name="Text Placeholder 2">
+            <a:extLst>
+              <a:ext uri="{FF2B5EF4-FFF2-40B4-BE49-F238E27FC236}">
+                <a16:creationId xmlns:a16="http://schemas.microsoft.com/office/drawing/2014/main" id="{668E3FEE-DD5A-392D-1AFE-2B82A934940C}"/>
+              </a:ext>
+            </a:extLst>
+          </p:cNvPr>
+          <p:cNvSpPr>
+            <a:spLocks noGrp="1"/>
+          </p:cNvSpPr>
+          <p:nvPr>
+            <p:ph type="body" sz="quarter" idx="10"/>
+          </p:nvPr>
+        </p:nvSpPr>
+        <p:spPr/>
+        <p:txBody>
+          <a:bodyPr/>
+          <a:lstStyle/>
+          <a:p>
+            <a:pPr marL="285750" indent="-285750">
+              <a:buFont typeface="Arial" panose="020B0604020202020204" pitchFamily="34" charset="0"/>
+              <a:buChar char="•"/>
+            </a:pPr>
+            <a:r>
+              <a:rPr lang="en-US" dirty="0"/>
+              <a:t>Order successfully went through</a:t>
+            </a:r>
+          </a:p>
+          <a:p>
+            <a:pPr marL="285750" indent="-285750">
+              <a:buFont typeface="Arial" panose="020B0604020202020204" pitchFamily="34" charset="0"/>
+              <a:buChar char="•"/>
+            </a:pPr>
+            <a:r>
+              <a:rPr lang="en-US" dirty="0"/>
+              <a:t>Card never charged, this time drill files are present and card will be charged</a:t>
+            </a:r>
+          </a:p>
+          <a:p>
+            <a:endParaRPr lang="en-US" dirty="0"/>
+          </a:p>
+        </p:txBody>
+      </p:sp>
+      <p:sp>
+        <p:nvSpPr>
+          <p:cNvPr id="4" name="Title 3">
+            <a:extLst>
+              <a:ext uri="{FF2B5EF4-FFF2-40B4-BE49-F238E27FC236}">
+                <a16:creationId xmlns:a16="http://schemas.microsoft.com/office/drawing/2014/main" id="{96972E0B-D288-B115-3E6A-EC6BE57EC9CD}"/>
+              </a:ext>
+            </a:extLst>
+          </p:cNvPr>
+          <p:cNvSpPr>
+            <a:spLocks noGrp="1"/>
+          </p:cNvSpPr>
+          <p:nvPr>
+            <p:ph type="title"/>
+          </p:nvPr>
+        </p:nvSpPr>
+        <p:spPr/>
+        <p:txBody>
+          <a:bodyPr/>
+          <a:lstStyle/>
+          <a:p>
+            <a:r>
+              <a:rPr lang="en-US" dirty="0"/>
+              <a:t>PCB Reordering</a:t>
+            </a:r>
+          </a:p>
+        </p:txBody>
+      </p:sp>
+      <p:sp>
+        <p:nvSpPr>
+          <p:cNvPr id="5" name="Footer Placeholder 4">
+            <a:extLst>
+              <a:ext uri="{FF2B5EF4-FFF2-40B4-BE49-F238E27FC236}">
+                <a16:creationId xmlns:a16="http://schemas.microsoft.com/office/drawing/2014/main" id="{9BCAE665-4A7D-8D5A-B994-77E62E9BB937}"/>
+              </a:ext>
+            </a:extLst>
+          </p:cNvPr>
+          <p:cNvSpPr>
+            <a:spLocks noGrp="1"/>
+          </p:cNvSpPr>
+          <p:nvPr>
+            <p:ph type="ftr" sz="quarter" idx="12"/>
+          </p:nvPr>
+        </p:nvSpPr>
+        <p:spPr/>
+        <p:txBody>
+          <a:bodyPr/>
+          <a:lstStyle/>
+          <a:p>
+            <a:pPr algn="r"/>
+            <a:r>
+              <a:rPr lang="en-US"/>
+              <a:t>3/31/23            ‹#›</a:t>
+            </a:r>
+            <a:endParaRPr lang="en-US" dirty="0"/>
+          </a:p>
+        </p:txBody>
+      </p:sp>
+      <p:pic>
+        <p:nvPicPr>
+          <p:cNvPr id="7" name="Picture 6" descr="A screenshot of a computer&#10;&#10;AI-generated content may be incorrect.">
+            <a:extLst>
+              <a:ext uri="{FF2B5EF4-FFF2-40B4-BE49-F238E27FC236}">
+                <a16:creationId xmlns:a16="http://schemas.microsoft.com/office/drawing/2014/main" id="{82E87EAE-11EF-41F1-F2BD-A977B70CA96C}"/>
+              </a:ext>
+            </a:extLst>
+          </p:cNvPr>
+          <p:cNvPicPr>
+            <a:picLocks noChangeAspect="1"/>
+          </p:cNvPicPr>
+          <p:nvPr/>
+        </p:nvPicPr>
+        <p:blipFill>
+          <a:blip r:embed="rId2"/>
+          <a:stretch>
+            <a:fillRect/>
+          </a:stretch>
+        </p:blipFill>
+        <p:spPr>
+          <a:xfrm>
+            <a:off x="2457450" y="2259788"/>
+            <a:ext cx="5559386" cy="3689256"/>
+          </a:xfrm>
+          <a:prstGeom prst="rect">
+            <a:avLst/>
+          </a:prstGeom>
+        </p:spPr>
+      </p:pic>
+    </p:spTree>
+    <p:extLst>
+      <p:ext uri="{BB962C8B-B14F-4D97-AF65-F5344CB8AC3E}">
+        <p14:creationId xmlns:p14="http://schemas.microsoft.com/office/powerpoint/2010/main" val="3635434199"/>
+      </p:ext>
+    </p:extLst>
+  </p:cSld>
+  <p:clrMapOvr>
+    <a:masterClrMapping/>
+  </p:clrMapOvr>
+</p:sld>
+</file>
+
+<file path=ppt/slides/slide5.xml><?xml version="1.0" encoding="utf-8"?>
+<p:sld xmlns:a="http://schemas.openxmlformats.org/drawingml/2006/main" xmlns:r="http://schemas.openxmlformats.org/officeDocument/2006/relationships" xmlns:p="http://schemas.openxmlformats.org/presentationml/2006/main">
+  <p:cSld>
+    <p:spTree>
+      <p:nvGrpSpPr>
         <p:cNvPr id="1" name=""/>
         <p:cNvGrpSpPr/>
         <p:nvPr/>
@@ -14375,7 +15040,7 @@
 </p:sld>
 </file>
 
-<file path=ppt/slides/slide5.xml><?xml version="1.0" encoding="utf-8"?>
+<file path=ppt/slides/slide6.xml><?xml version="1.0" encoding="utf-8"?>
 <p:sld xmlns:a="http://schemas.openxmlformats.org/drawingml/2006/main" xmlns:r="http://schemas.openxmlformats.org/officeDocument/2006/relationships" xmlns:p="http://schemas.openxmlformats.org/presentationml/2006/main">
   <p:cSld>
     <p:spTree>
@@ -14575,7 +15240,7 @@
 </p:sld>
 </file>
 
-<file path=ppt/slides/slide6.xml><?xml version="1.0" encoding="utf-8"?>
+<file path=ppt/slides/slide7.xml><?xml version="1.0" encoding="utf-8"?>
 <p:sld xmlns:a="http://schemas.openxmlformats.org/drawingml/2006/main" xmlns:r="http://schemas.openxmlformats.org/officeDocument/2006/relationships" xmlns:p="http://schemas.openxmlformats.org/presentationml/2006/main">
   <p:cSld>
     <p:spTree>
@@ -14830,7 +15495,7 @@
 </p:sld>
 </file>
 
-<file path=ppt/slides/slide7.xml><?xml version="1.0" encoding="utf-8"?>
+<file path=ppt/slides/slide8.xml><?xml version="1.0" encoding="utf-8"?>
 <p:sld xmlns:a="http://schemas.openxmlformats.org/drawingml/2006/main" xmlns:r="http://schemas.openxmlformats.org/officeDocument/2006/relationships" xmlns:p="http://schemas.openxmlformats.org/presentationml/2006/main">
   <p:cSld>
     <p:spTree>
@@ -15073,7 +15738,7 @@
 </p:sld>
 </file>
 
-<file path=ppt/slides/slide8.xml><?xml version="1.0" encoding="utf-8"?>
+<file path=ppt/slides/slide9.xml><?xml version="1.0" encoding="utf-8"?>
 <p:sld xmlns:a="http://schemas.openxmlformats.org/drawingml/2006/main" xmlns:r="http://schemas.openxmlformats.org/officeDocument/2006/relationships" xmlns:p="http://schemas.openxmlformats.org/presentationml/2006/main">
   <p:cSld>
     <p:spTree>
@@ -15285,206 +15950,6 @@
     <p:extLst>
       <p:ext uri="{BB962C8B-B14F-4D97-AF65-F5344CB8AC3E}">
         <p14:creationId xmlns:p14="http://schemas.microsoft.com/office/powerpoint/2010/main" val="1904540960"/>
-      </p:ext>
-    </p:extLst>
-  </p:cSld>
-  <p:clrMapOvr>
-    <a:masterClrMapping/>
-  </p:clrMapOvr>
-</p:sld>
-</file>
-
-<file path=ppt/slides/slide9.xml><?xml version="1.0" encoding="utf-8"?>
-<p:sld xmlns:a="http://schemas.openxmlformats.org/drawingml/2006/main" xmlns:r="http://schemas.openxmlformats.org/officeDocument/2006/relationships" xmlns:p="http://schemas.openxmlformats.org/presentationml/2006/main">
-  <p:cSld>
-    <p:spTree>
-      <p:nvGrpSpPr>
-        <p:cNvPr id="1" name=""/>
-        <p:cNvGrpSpPr/>
-        <p:nvPr/>
-      </p:nvGrpSpPr>
-      <p:grpSpPr>
-        <a:xfrm>
-          <a:off x="0" y="0"/>
-          <a:ext cx="0" cy="0"/>
-          <a:chOff x="0" y="0"/>
-          <a:chExt cx="0" cy="0"/>
-        </a:xfrm>
-      </p:grpSpPr>
-      <p:sp>
-        <p:nvSpPr>
-          <p:cNvPr id="2" name="Text Placeholder 1">
-            <a:extLst>
-              <a:ext uri="{FF2B5EF4-FFF2-40B4-BE49-F238E27FC236}">
-                <a16:creationId xmlns:a16="http://schemas.microsoft.com/office/drawing/2014/main" id="{11B29CAD-3B43-3BC0-D2EC-A53874ABB884}"/>
-              </a:ext>
-            </a:extLst>
-          </p:cNvPr>
-          <p:cNvSpPr>
-            <a:spLocks noGrp="1"/>
-          </p:cNvSpPr>
-          <p:nvPr>
-            <p:ph type="body" sz="quarter" idx="11"/>
-          </p:nvPr>
-        </p:nvSpPr>
-        <p:spPr/>
-        <p:txBody>
-          <a:bodyPr/>
-          <a:lstStyle/>
-          <a:p>
-            <a:r>
-              <a:rPr lang="en-US" dirty="0"/>
-              <a:t>Blockers &amp; Next Week’s Work</a:t>
-            </a:r>
-          </a:p>
-        </p:txBody>
-      </p:sp>
-      <p:sp>
-        <p:nvSpPr>
-          <p:cNvPr id="3" name="Text Placeholder 2">
-            <a:extLst>
-              <a:ext uri="{FF2B5EF4-FFF2-40B4-BE49-F238E27FC236}">
-                <a16:creationId xmlns:a16="http://schemas.microsoft.com/office/drawing/2014/main" id="{A9F87380-04A3-DD16-EAB3-0921830BDF50}"/>
-              </a:ext>
-            </a:extLst>
-          </p:cNvPr>
-          <p:cNvSpPr>
-            <a:spLocks noGrp="1"/>
-          </p:cNvSpPr>
-          <p:nvPr>
-            <p:ph type="body" sz="quarter" idx="10"/>
-          </p:nvPr>
-        </p:nvSpPr>
-        <p:spPr/>
-        <p:txBody>
-          <a:bodyPr/>
-          <a:lstStyle/>
-          <a:p>
-            <a:pPr marL="285750" indent="-285750">
-              <a:buFont typeface="Arial" panose="020B0604020202020204" pitchFamily="34" charset="0"/>
-              <a:buChar char="•"/>
-            </a:pPr>
-            <a:r>
-              <a:rPr lang="en-US" dirty="0"/>
-              <a:t>Need to find the suitable battery replacement on the PCB</a:t>
-            </a:r>
-          </a:p>
-          <a:p>
-            <a:pPr marL="285750" indent="-285750">
-              <a:buFont typeface="Arial" panose="020B0604020202020204" pitchFamily="34" charset="0"/>
-              <a:buChar char="•"/>
-            </a:pPr>
-            <a:r>
-              <a:rPr lang="en-US" dirty="0"/>
-              <a:t>Work on Hybrid Approach for Data Collection</a:t>
-            </a:r>
-          </a:p>
-          <a:p>
-            <a:pPr marL="285750" indent="-285750">
-              <a:buFont typeface="Arial" panose="020B0604020202020204" pitchFamily="34" charset="0"/>
-              <a:buChar char="•"/>
-            </a:pPr>
-            <a:r>
-              <a:rPr lang="en-US" dirty="0"/>
-              <a:t>Fix Issue where Nicla IMU turned off unexpectedly after a prolonged time of data collection</a:t>
-            </a:r>
-          </a:p>
-          <a:p>
-            <a:pPr marL="285750" indent="-285750">
-              <a:buFont typeface="Arial" panose="020B0604020202020204" pitchFamily="34" charset="0"/>
-              <a:buChar char="•"/>
-            </a:pPr>
-            <a:r>
-              <a:rPr lang="en-US" dirty="0"/>
-              <a:t>Instruct Agriculture Department (</a:t>
-            </a:r>
-            <a:r>
-              <a:rPr lang="en-US" dirty="0" err="1"/>
-              <a:t>Omosalewa</a:t>
-            </a:r>
-            <a:r>
-              <a:rPr lang="en-US" dirty="0"/>
-              <a:t>) on what to do with the boards</a:t>
-            </a:r>
-          </a:p>
-          <a:p>
-            <a:pPr marL="285750" indent="-285750">
-              <a:buFont typeface="Arial" panose="020B0604020202020204" pitchFamily="34" charset="0"/>
-              <a:buChar char="•"/>
-            </a:pPr>
-            <a:r>
-              <a:rPr lang="en-US" dirty="0"/>
-              <a:t>Get Sample Data on Force Impacts (Small, Medium, </a:t>
-            </a:r>
-            <a:r>
-              <a:rPr lang="en-US"/>
-              <a:t>Large Impacts)</a:t>
-            </a:r>
-            <a:endParaRPr lang="en-US" dirty="0"/>
-          </a:p>
-        </p:txBody>
-      </p:sp>
-      <p:sp>
-        <p:nvSpPr>
-          <p:cNvPr id="4" name="Title 3">
-            <a:extLst>
-              <a:ext uri="{FF2B5EF4-FFF2-40B4-BE49-F238E27FC236}">
-                <a16:creationId xmlns:a16="http://schemas.microsoft.com/office/drawing/2014/main" id="{47D02411-52BC-0A6C-B958-234593BB194F}"/>
-              </a:ext>
-            </a:extLst>
-          </p:cNvPr>
-          <p:cNvSpPr>
-            <a:spLocks noGrp="1"/>
-          </p:cNvSpPr>
-          <p:nvPr>
-            <p:ph type="title"/>
-          </p:nvPr>
-        </p:nvSpPr>
-        <p:spPr/>
-        <p:txBody>
-          <a:bodyPr/>
-          <a:lstStyle/>
-          <a:p>
-            <a:r>
-              <a:rPr lang="en-US" dirty="0"/>
-              <a:t>Next Week</a:t>
-            </a:r>
-          </a:p>
-        </p:txBody>
-      </p:sp>
-      <p:sp>
-        <p:nvSpPr>
-          <p:cNvPr id="5" name="Footer Placeholder 4">
-            <a:extLst>
-              <a:ext uri="{FF2B5EF4-FFF2-40B4-BE49-F238E27FC236}">
-                <a16:creationId xmlns:a16="http://schemas.microsoft.com/office/drawing/2014/main" id="{51BAB307-58AA-C3F2-0BBB-500351B01F7A}"/>
-              </a:ext>
-            </a:extLst>
-          </p:cNvPr>
-          <p:cNvSpPr>
-            <a:spLocks noGrp="1"/>
-          </p:cNvSpPr>
-          <p:nvPr>
-            <p:ph type="ftr" sz="quarter" idx="12"/>
-          </p:nvPr>
-        </p:nvSpPr>
-        <p:spPr/>
-        <p:txBody>
-          <a:bodyPr/>
-          <a:lstStyle/>
-          <a:p>
-            <a:pPr algn="r"/>
-            <a:r>
-              <a:rPr lang="en-US" dirty="0"/>
-              <a:t>6/7</a:t>
-            </a:r>
-          </a:p>
-        </p:txBody>
-      </p:sp>
-    </p:spTree>
-    <p:extLst>
-      <p:ext uri="{BB962C8B-B14F-4D97-AF65-F5344CB8AC3E}">
-        <p14:creationId xmlns:p14="http://schemas.microsoft.com/office/powerpoint/2010/main" val="257444251"/>
       </p:ext>
     </p:extLst>
   </p:cSld>
